--- a/Пояснительная записка/Защитная презентация.pptx
+++ b/Пояснительная записка/Защитная презентация.pptx
@@ -13,11 +13,11 @@
     <p:sldId id="261" r:id="rId7"/>
     <p:sldId id="262" r:id="rId8"/>
     <p:sldId id="270" r:id="rId9"/>
-    <p:sldId id="271" r:id="rId10"/>
-    <p:sldId id="272" r:id="rId11"/>
-    <p:sldId id="263" r:id="rId12"/>
-    <p:sldId id="264" r:id="rId13"/>
-    <p:sldId id="267" r:id="rId14"/>
+    <p:sldId id="267" r:id="rId10"/>
+    <p:sldId id="271" r:id="rId11"/>
+    <p:sldId id="272" r:id="rId12"/>
+    <p:sldId id="263" r:id="rId13"/>
+    <p:sldId id="264" r:id="rId14"/>
     <p:sldId id="273" r:id="rId15"/>
     <p:sldId id="268" r:id="rId16"/>
     <p:sldId id="269" r:id="rId17"/>
@@ -453,7 +453,7 @@
                 <a:effectLst/>
                 <a:latin typeface="-apple-system"/>
               </a:rPr>
-              <a:t>ER-</a:t>
+              <a:t>Docker </a:t>
             </a:r>
             <a:r>
               <a:rPr lang="ru-RU" sz="2800" b="1" i="0" dirty="0">
@@ -463,7 +463,254 @@
                 <a:effectLst/>
                 <a:latin typeface="-apple-system"/>
               </a:rPr>
-              <a:t>диаграмма базы данных</a:t>
+              <a:t>и </a:t>
+            </a:r>
+            <a:r>
+              <a:rPr lang="en-US" sz="2800" b="1" i="0" dirty="0" err="1">
+                <a:solidFill>
+                  <a:schemeClr val="bg1"/>
+                </a:solidFill>
+                <a:effectLst/>
+                <a:latin typeface="-apple-system"/>
+              </a:rPr>
+              <a:t>RoadRunner</a:t>
+            </a:r>
+            <a:endParaRPr lang="en-US" sz="2800" b="1" i="0" dirty="0">
+              <a:solidFill>
+                <a:schemeClr val="bg1"/>
+              </a:solidFill>
+              <a:effectLst/>
+              <a:latin typeface="-apple-system"/>
+            </a:endParaRPr>
+          </a:p>
+        </p:txBody>
+      </p:sp>
+      <p:sp>
+        <p:nvSpPr>
+          <p:cNvPr id="4" name="Content"/>
+          <p:cNvSpPr txBox="1"/>
+          <p:nvPr/>
+        </p:nvSpPr>
+        <p:spPr>
+          <a:xfrm>
+            <a:off x="600000" y="1180000"/>
+            <a:ext cx="5572200" cy="4800000"/>
+          </a:xfrm>
+          <a:prstGeom prst="rect">
+            <a:avLst/>
+          </a:prstGeom>
+          <a:noFill/>
+          <a:ln>
+            <a:noFill/>
+          </a:ln>
+        </p:spPr>
+        <p:txBody>
+          <a:bodyPr wrap="square" rtlCol="0" anchor="t"/>
+          <a:lstStyle/>
+          <a:p>
+            <a:pPr algn="l">
+              <a:buFont typeface="Arial" panose="020B0604020202020204" pitchFamily="34" charset="0"/>
+              <a:buChar char="•"/>
+            </a:pPr>
+            <a:r>
+              <a:rPr lang="ru-RU" b="0" i="0" dirty="0" err="1">
+                <a:solidFill>
+                  <a:srgbClr val="1A1C1F"/>
+                </a:solidFill>
+                <a:effectLst/>
+                <a:latin typeface="-apple-system"/>
+              </a:rPr>
+              <a:t>Docker</a:t>
+            </a:r>
+            <a:r>
+              <a:rPr lang="ru-RU" b="0" i="0" dirty="0">
+                <a:solidFill>
+                  <a:srgbClr val="1A1C1F"/>
+                </a:solidFill>
+                <a:effectLst/>
+                <a:latin typeface="-apple-system"/>
+              </a:rPr>
+              <a:t> используется для воспроизводимого развертывания;</a:t>
+            </a:r>
+          </a:p>
+          <a:p>
+            <a:pPr algn="l">
+              <a:buFont typeface="Arial" panose="020B0604020202020204" pitchFamily="34" charset="0"/>
+              <a:buChar char="•"/>
+            </a:pPr>
+            <a:r>
+              <a:rPr lang="ru-RU" b="0" i="0" dirty="0">
+                <a:solidFill>
+                  <a:srgbClr val="1A1C1F"/>
+                </a:solidFill>
+                <a:effectLst/>
+                <a:latin typeface="-apple-system"/>
+              </a:rPr>
+              <a:t>контейнеризация уменьшает зависимость от локального окружения;</a:t>
+            </a:r>
+          </a:p>
+          <a:p>
+            <a:pPr algn="l">
+              <a:buFont typeface="Arial" panose="020B0604020202020204" pitchFamily="34" charset="0"/>
+              <a:buChar char="•"/>
+            </a:pPr>
+            <a:r>
+              <a:rPr lang="ru-RU" b="0" i="0" dirty="0" err="1">
+                <a:solidFill>
+                  <a:srgbClr val="1A1C1F"/>
+                </a:solidFill>
+                <a:effectLst/>
+                <a:latin typeface="-apple-system"/>
+              </a:rPr>
+              <a:t>RoadRunner</a:t>
+            </a:r>
+            <a:r>
+              <a:rPr lang="ru-RU" b="0" i="0" dirty="0">
+                <a:solidFill>
+                  <a:srgbClr val="1A1C1F"/>
+                </a:solidFill>
+                <a:effectLst/>
+                <a:latin typeface="-apple-system"/>
+              </a:rPr>
+              <a:t> - высокопроизводительный </a:t>
+            </a:r>
+            <a:r>
+              <a:rPr lang="ru-RU" b="0" i="0" dirty="0" err="1">
+                <a:solidFill>
+                  <a:srgbClr val="1A1C1F"/>
+                </a:solidFill>
+                <a:effectLst/>
+                <a:latin typeface="-apple-system"/>
+              </a:rPr>
+              <a:t>application</a:t>
+            </a:r>
+            <a:r>
+              <a:rPr lang="ru-RU" b="0" i="0" dirty="0">
+                <a:solidFill>
+                  <a:srgbClr val="1A1C1F"/>
+                </a:solidFill>
+                <a:effectLst/>
+                <a:latin typeface="-apple-system"/>
+              </a:rPr>
+              <a:t> </a:t>
+            </a:r>
+            <a:r>
+              <a:rPr lang="ru-RU" b="0" i="0" dirty="0" err="1">
+                <a:solidFill>
+                  <a:srgbClr val="1A1C1F"/>
+                </a:solidFill>
+                <a:effectLst/>
+                <a:latin typeface="-apple-system"/>
+              </a:rPr>
+              <a:t>server</a:t>
+            </a:r>
+            <a:r>
+              <a:rPr lang="ru-RU" b="0" i="0" dirty="0">
+                <a:solidFill>
+                  <a:srgbClr val="1A1C1F"/>
+                </a:solidFill>
+                <a:effectLst/>
+                <a:latin typeface="-apple-system"/>
+              </a:rPr>
+              <a:t> для PHP;</a:t>
+            </a:r>
+          </a:p>
+          <a:p>
+            <a:pPr algn="l">
+              <a:buFont typeface="Arial" panose="020B0604020202020204" pitchFamily="34" charset="0"/>
+              <a:buChar char="•"/>
+            </a:pPr>
+            <a:r>
+              <a:rPr lang="ru-RU" b="0" i="0" dirty="0" err="1">
+                <a:solidFill>
+                  <a:srgbClr val="1A1C1F"/>
+                </a:solidFill>
+                <a:effectLst/>
+                <a:latin typeface="-apple-system"/>
+              </a:rPr>
+              <a:t>Laravel</a:t>
+            </a:r>
+            <a:r>
+              <a:rPr lang="ru-RU" b="0" i="0" dirty="0">
+                <a:solidFill>
+                  <a:srgbClr val="1A1C1F"/>
+                </a:solidFill>
+                <a:effectLst/>
+                <a:latin typeface="-apple-system"/>
+              </a:rPr>
+              <a:t> в связке с </a:t>
+            </a:r>
+            <a:r>
+              <a:rPr lang="ru-RU" b="0" i="0" dirty="0" err="1">
+                <a:solidFill>
+                  <a:srgbClr val="1A1C1F"/>
+                </a:solidFill>
+                <a:effectLst/>
+                <a:latin typeface="-apple-system"/>
+              </a:rPr>
+              <a:t>RoadRunner</a:t>
+            </a:r>
+            <a:r>
+              <a:rPr lang="ru-RU" b="0" i="0" dirty="0">
+                <a:solidFill>
+                  <a:srgbClr val="1A1C1F"/>
+                </a:solidFill>
+                <a:effectLst/>
+                <a:latin typeface="-apple-system"/>
+              </a:rPr>
+              <a:t> работает через долгоживущие </a:t>
+            </a:r>
+            <a:r>
+              <a:rPr lang="ru-RU" b="0" i="0" dirty="0" err="1">
+                <a:solidFill>
+                  <a:srgbClr val="1A1C1F"/>
+                </a:solidFill>
+                <a:effectLst/>
+                <a:latin typeface="-apple-system"/>
+              </a:rPr>
+              <a:t>worker</a:t>
+            </a:r>
+            <a:r>
+              <a:rPr lang="ru-RU" b="0" i="0" dirty="0">
+                <a:solidFill>
+                  <a:srgbClr val="1A1C1F"/>
+                </a:solidFill>
+                <a:effectLst/>
+                <a:latin typeface="-apple-system"/>
+              </a:rPr>
+              <a:t>-процессы;</a:t>
+            </a:r>
+          </a:p>
+          <a:p>
+            <a:pPr algn="l">
+              <a:buFont typeface="Arial" panose="020B0604020202020204" pitchFamily="34" charset="0"/>
+              <a:buChar char="•"/>
+            </a:pPr>
+            <a:r>
+              <a:rPr lang="ru-RU" b="0" i="0" dirty="0">
+                <a:solidFill>
+                  <a:srgbClr val="1A1C1F"/>
+                </a:solidFill>
+                <a:effectLst/>
+                <a:latin typeface="-apple-system"/>
+              </a:rPr>
+              <a:t>уменьшаются затраты на повторную инициализацию приложения;</a:t>
+            </a:r>
+          </a:p>
+          <a:p>
+            <a:pPr algn="l">
+              <a:buFont typeface="Arial" panose="020B0604020202020204" pitchFamily="34" charset="0"/>
+              <a:buChar char="•"/>
+            </a:pPr>
+            <a:r>
+              <a:rPr lang="ru-RU" b="0" i="0" dirty="0">
+                <a:solidFill>
+                  <a:srgbClr val="1A1C1F"/>
+                </a:solidFill>
+                <a:effectLst/>
+                <a:latin typeface="-apple-system"/>
+              </a:rPr>
+              <a:t>особенно заметен эффект на часто вызываемых API-маршрутах.</a:t>
             </a:r>
           </a:p>
         </p:txBody>
@@ -503,40 +750,45 @@
           </a:p>
         </p:txBody>
       </p:sp>
-      <p:pic>
-        <p:nvPicPr>
-          <p:cNvPr id="9" name="Рисунок 8">
+      <p:sp>
+        <p:nvSpPr>
+          <p:cNvPr id="7" name="TextBox 6">
             <a:extLst>
               <a:ext uri="{FF2B5EF4-FFF2-40B4-BE49-F238E27FC236}">
-                <a16:creationId xmlns:a16="http://schemas.microsoft.com/office/drawing/2014/main" id="{E0D0E728-48AE-4146-AC3F-005E48F4734B}"/>
+                <a16:creationId xmlns:a16="http://schemas.microsoft.com/office/drawing/2014/main" id="{46ADF31C-0025-49D7-8445-DE2B78ED1E68}"/>
               </a:ext>
             </a:extLst>
           </p:cNvPr>
-          <p:cNvPicPr>
-            <a:picLocks noChangeAspect="1"/>
-          </p:cNvPicPr>
-          <p:nvPr/>
-        </p:nvPicPr>
-        <p:blipFill>
-          <a:blip r:embed="rId2"/>
-          <a:stretch>
-            <a:fillRect/>
-          </a:stretch>
-        </p:blipFill>
-        <p:spPr>
-          <a:xfrm>
-            <a:off x="2209800" y="1066800"/>
-            <a:ext cx="7083823" cy="5678192"/>
-          </a:xfrm>
-          <a:prstGeom prst="rect">
-            <a:avLst/>
-          </a:prstGeom>
-        </p:spPr>
-      </p:pic>
+          <p:cNvSpPr txBox="1"/>
+          <p:nvPr/>
+        </p:nvSpPr>
+        <p:spPr>
+          <a:xfrm>
+            <a:off x="7315200" y="2590800"/>
+            <a:ext cx="3733800" cy="646331"/>
+          </a:xfrm>
+          <a:prstGeom prst="rect">
+            <a:avLst/>
+          </a:prstGeom>
+          <a:noFill/>
+        </p:spPr>
+        <p:txBody>
+          <a:bodyPr wrap="square" rtlCol="0">
+            <a:spAutoFit/>
+          </a:bodyPr>
+          <a:lstStyle/>
+          <a:p>
+            <a:r>
+              <a:rPr lang="ru-RU" dirty="0"/>
+              <a:t>Картинка где наглядно сравнивается скорость работы</a:t>
+            </a:r>
+          </a:p>
+        </p:txBody>
+      </p:sp>
     </p:spTree>
     <p:extLst>
       <p:ext uri="{BB962C8B-B14F-4D97-AF65-F5344CB8AC3E}">
-        <p14:creationId xmlns:p14="http://schemas.microsoft.com/office/powerpoint/2010/main" val="2039263378"/>
+        <p14:creationId xmlns:p14="http://schemas.microsoft.com/office/powerpoint/2010/main" val="4286770091"/>
       </p:ext>
     </p:extLst>
   </p:cSld>
@@ -549,14 +801,6 @@
 <file path=ppt/slides/slide11.xml><?xml version="1.0" encoding="utf-8"?>
 <p:sld xmlns:a="http://schemas.openxmlformats.org/drawingml/2006/main" xmlns:r="http://schemas.openxmlformats.org/officeDocument/2006/relationships" xmlns:p="http://schemas.openxmlformats.org/presentationml/2006/main">
   <p:cSld>
-    <p:bg>
-      <p:bgPr>
-        <a:solidFill>
-          <a:srgbClr val="F4F7F1"/>
-        </a:solidFill>
-        <a:effectLst/>
-      </p:bgPr>
-    </p:bg>
     <p:spTree>
       <p:nvGrpSpPr>
         <p:cNvPr id="1" name=""/>
@@ -656,384 +900,26 @@
           <a:bodyPr wrap="square" rtlCol="0" anchor="t"/>
           <a:lstStyle/>
           <a:p>
-            <a:r>
-              <a:rPr lang="ru-RU" sz="2600" b="1" dirty="0">
-                <a:solidFill>
-                  <a:srgbClr val="FFFFFF"/>
-                </a:solidFill>
-              </a:rPr>
-              <a:t>Технологии frontend</a:t>
-            </a:r>
-            <a:endParaRPr lang="ru-RU" sz="2600" dirty="0"/>
-          </a:p>
-        </p:txBody>
-      </p:sp>
-      <p:sp>
-        <p:nvSpPr>
-          <p:cNvPr id="4" name="Content"/>
-          <p:cNvSpPr txBox="1"/>
-          <p:nvPr/>
-        </p:nvSpPr>
-        <p:spPr>
-          <a:xfrm>
-            <a:off x="600001" y="1180000"/>
-            <a:ext cx="5343599" cy="4800000"/>
-          </a:xfrm>
-          <a:prstGeom prst="rect">
-            <a:avLst/>
-          </a:prstGeom>
-          <a:noFill/>
-          <a:ln>
-            <a:noFill/>
-          </a:ln>
-        </p:spPr>
-        <p:txBody>
-          <a:bodyPr wrap="square" rtlCol="0" anchor="t"/>
-          <a:lstStyle/>
-          <a:p>
-            <a:pPr algn="l">
-              <a:buFont typeface="Arial" panose="020B0604020202020204" pitchFamily="34" charset="0"/>
-              <a:buChar char="•"/>
-            </a:pPr>
-            <a:r>
-              <a:rPr lang="en-US" sz="2400" b="0" i="0" dirty="0">
-                <a:solidFill>
-                  <a:srgbClr val="1A1C1F"/>
-                </a:solidFill>
-                <a:effectLst/>
-                <a:latin typeface="-apple-system"/>
-              </a:rPr>
-              <a:t>Vue.js 3 </a:t>
-            </a:r>
-            <a:r>
-              <a:rPr lang="ru-RU" sz="2400" b="0" i="0" dirty="0">
-                <a:solidFill>
-                  <a:srgbClr val="1A1C1F"/>
-                </a:solidFill>
-                <a:effectLst/>
-                <a:latin typeface="-apple-system"/>
-              </a:rPr>
-              <a:t>как основа </a:t>
-            </a:r>
-            <a:r>
-              <a:rPr lang="en-US" sz="2400" b="0" i="0" dirty="0">
-                <a:solidFill>
-                  <a:srgbClr val="1A1C1F"/>
-                </a:solidFill>
-                <a:effectLst/>
-                <a:latin typeface="-apple-system"/>
-              </a:rPr>
-              <a:t>SPA-</a:t>
-            </a:r>
-            <a:r>
-              <a:rPr lang="ru-RU" sz="2400" b="0" i="0" dirty="0">
-                <a:solidFill>
-                  <a:srgbClr val="1A1C1F"/>
-                </a:solidFill>
-                <a:effectLst/>
-                <a:latin typeface="-apple-system"/>
-              </a:rPr>
-              <a:t>интерфейса;</a:t>
-            </a:r>
-          </a:p>
-          <a:p>
-            <a:pPr algn="l">
-              <a:buFont typeface="Arial" panose="020B0604020202020204" pitchFamily="34" charset="0"/>
-              <a:buChar char="•"/>
-            </a:pPr>
-            <a:r>
-              <a:rPr lang="en-US" sz="2400" b="0" i="0" dirty="0" err="1">
-                <a:solidFill>
-                  <a:srgbClr val="1A1C1F"/>
-                </a:solidFill>
-                <a:effectLst/>
-                <a:latin typeface="-apple-system"/>
-              </a:rPr>
-              <a:t>Vite</a:t>
-            </a:r>
-            <a:r>
-              <a:rPr lang="en-US" sz="2400" b="0" i="0" dirty="0">
-                <a:solidFill>
-                  <a:srgbClr val="1A1C1F"/>
-                </a:solidFill>
-                <a:effectLst/>
-                <a:latin typeface="-apple-system"/>
-              </a:rPr>
-              <a:t> </a:t>
-            </a:r>
-            <a:r>
-              <a:rPr lang="ru-RU" sz="2400" b="0" i="0" dirty="0">
-                <a:solidFill>
-                  <a:srgbClr val="1A1C1F"/>
-                </a:solidFill>
-                <a:effectLst/>
-                <a:latin typeface="-apple-system"/>
-              </a:rPr>
-              <a:t>для разработки и </a:t>
-            </a:r>
-            <a:r>
-              <a:rPr lang="en-US" sz="2400" b="0" i="0" dirty="0">
-                <a:solidFill>
-                  <a:srgbClr val="1A1C1F"/>
-                </a:solidFill>
-                <a:effectLst/>
-                <a:latin typeface="-apple-system"/>
-              </a:rPr>
-              <a:t>production-</a:t>
-            </a:r>
-            <a:r>
-              <a:rPr lang="ru-RU" sz="2400" b="0" i="0" dirty="0">
-                <a:solidFill>
-                  <a:srgbClr val="1A1C1F"/>
-                </a:solidFill>
-                <a:effectLst/>
-                <a:latin typeface="-apple-system"/>
-              </a:rPr>
-              <a:t>сборки;</a:t>
-            </a:r>
-          </a:p>
-          <a:p>
-            <a:pPr algn="l">
-              <a:buFont typeface="Arial" panose="020B0604020202020204" pitchFamily="34" charset="0"/>
-              <a:buChar char="•"/>
-            </a:pPr>
-            <a:r>
-              <a:rPr lang="en-US" sz="2400" b="0" i="0" dirty="0">
-                <a:solidFill>
-                  <a:srgbClr val="1A1C1F"/>
-                </a:solidFill>
-                <a:effectLst/>
-                <a:latin typeface="-apple-system"/>
-              </a:rPr>
-              <a:t>Vue Router </a:t>
-            </a:r>
-            <a:r>
-              <a:rPr lang="ru-RU" sz="2400" b="0" i="0" dirty="0">
-                <a:solidFill>
-                  <a:srgbClr val="1A1C1F"/>
-                </a:solidFill>
-                <a:effectLst/>
-                <a:latin typeface="-apple-system"/>
-              </a:rPr>
-              <a:t>для маршрутизации;</a:t>
-            </a:r>
-          </a:p>
-          <a:p>
-            <a:pPr algn="l">
-              <a:buFont typeface="Arial" panose="020B0604020202020204" pitchFamily="34" charset="0"/>
-              <a:buChar char="•"/>
-            </a:pPr>
-            <a:r>
-              <a:rPr lang="en-US" sz="2400" b="0" i="0" dirty="0" err="1">
-                <a:solidFill>
-                  <a:srgbClr val="1A1C1F"/>
-                </a:solidFill>
-                <a:effectLst/>
-                <a:latin typeface="-apple-system"/>
-              </a:rPr>
-              <a:t>Pinia</a:t>
-            </a:r>
-            <a:r>
-              <a:rPr lang="en-US" sz="2400" b="0" i="0" dirty="0">
-                <a:solidFill>
-                  <a:srgbClr val="1A1C1F"/>
-                </a:solidFill>
-                <a:effectLst/>
-                <a:latin typeface="-apple-system"/>
-              </a:rPr>
-              <a:t> </a:t>
-            </a:r>
-            <a:r>
-              <a:rPr lang="ru-RU" sz="2400" b="0" i="0" dirty="0">
-                <a:solidFill>
-                  <a:srgbClr val="1A1C1F"/>
-                </a:solidFill>
-                <a:effectLst/>
-                <a:latin typeface="-apple-system"/>
-              </a:rPr>
-              <a:t>для централизованного состояния;</a:t>
-            </a:r>
-          </a:p>
-          <a:p>
-            <a:pPr algn="l">
-              <a:buFont typeface="Arial" panose="020B0604020202020204" pitchFamily="34" charset="0"/>
-              <a:buChar char="•"/>
-            </a:pPr>
-            <a:r>
-              <a:rPr lang="en-US" sz="2400" b="0" i="0" dirty="0" err="1">
-                <a:solidFill>
-                  <a:srgbClr val="1A1C1F"/>
-                </a:solidFill>
-                <a:effectLst/>
-                <a:latin typeface="-apple-system"/>
-              </a:rPr>
-              <a:t>VeeValidate</a:t>
-            </a:r>
-            <a:r>
-              <a:rPr lang="en-US" sz="2400" b="0" i="0" dirty="0">
-                <a:solidFill>
-                  <a:srgbClr val="1A1C1F"/>
-                </a:solidFill>
-                <a:effectLst/>
-                <a:latin typeface="-apple-system"/>
-              </a:rPr>
-              <a:t> </a:t>
-            </a:r>
-            <a:r>
-              <a:rPr lang="ru-RU" sz="2400" b="0" i="0" dirty="0">
-                <a:solidFill>
-                  <a:srgbClr val="1A1C1F"/>
-                </a:solidFill>
-                <a:effectLst/>
-                <a:latin typeface="-apple-system"/>
-              </a:rPr>
-              <a:t>и </a:t>
-            </a:r>
-            <a:r>
-              <a:rPr lang="en-US" sz="2400" b="0" i="0" dirty="0">
-                <a:solidFill>
-                  <a:srgbClr val="1A1C1F"/>
-                </a:solidFill>
-                <a:effectLst/>
-                <a:latin typeface="-apple-system"/>
-              </a:rPr>
-              <a:t>Zod </a:t>
-            </a:r>
-            <a:r>
-              <a:rPr lang="ru-RU" sz="2400" b="0" i="0" dirty="0">
-                <a:solidFill>
-                  <a:srgbClr val="1A1C1F"/>
-                </a:solidFill>
-                <a:effectLst/>
-                <a:latin typeface="-apple-system"/>
-              </a:rPr>
-              <a:t>для форм и валидации;</a:t>
-            </a:r>
-          </a:p>
-          <a:p>
-            <a:pPr algn="l">
-              <a:buFont typeface="Arial" panose="020B0604020202020204" pitchFamily="34" charset="0"/>
-              <a:buChar char="•"/>
-            </a:pPr>
-            <a:r>
-              <a:rPr lang="en-US" sz="2400" b="0" i="0" dirty="0">
-                <a:solidFill>
-                  <a:srgbClr val="1A1C1F"/>
-                </a:solidFill>
-                <a:effectLst/>
-                <a:latin typeface="-apple-system"/>
-              </a:rPr>
-              <a:t>Chart.js, </a:t>
-            </a:r>
-            <a:r>
-              <a:rPr lang="en-US" sz="2400" b="0" i="0" dirty="0" err="1">
-                <a:solidFill>
-                  <a:srgbClr val="1A1C1F"/>
-                </a:solidFill>
-                <a:effectLst/>
-                <a:latin typeface="-apple-system"/>
-              </a:rPr>
-              <a:t>vue-chartjs</a:t>
-            </a:r>
-            <a:r>
-              <a:rPr lang="en-US" sz="2400" b="0" i="0" dirty="0">
-                <a:solidFill>
-                  <a:srgbClr val="1A1C1F"/>
-                </a:solidFill>
-                <a:effectLst/>
-                <a:latin typeface="-apple-system"/>
-              </a:rPr>
-              <a:t>, </a:t>
-            </a:r>
-            <a:r>
-              <a:rPr lang="en-US" sz="2400" b="0" i="0" dirty="0" err="1">
-                <a:solidFill>
-                  <a:srgbClr val="1A1C1F"/>
-                </a:solidFill>
-                <a:effectLst/>
-                <a:latin typeface="-apple-system"/>
-              </a:rPr>
-              <a:t>lucide</a:t>
-            </a:r>
-            <a:r>
-              <a:rPr lang="en-US" sz="2400" b="0" i="0" dirty="0">
-                <a:solidFill>
-                  <a:srgbClr val="1A1C1F"/>
-                </a:solidFill>
-                <a:effectLst/>
-                <a:latin typeface="-apple-system"/>
-              </a:rPr>
-              <a:t>-</a:t>
-            </a:r>
-            <a:r>
-              <a:rPr lang="en-US" sz="2400" b="0" i="0" dirty="0" err="1">
-                <a:solidFill>
-                  <a:srgbClr val="1A1C1F"/>
-                </a:solidFill>
-                <a:effectLst/>
-                <a:latin typeface="-apple-system"/>
-              </a:rPr>
-              <a:t>vue</a:t>
-            </a:r>
-            <a:r>
-              <a:rPr lang="en-US" sz="2400" b="0" i="0" dirty="0">
-                <a:solidFill>
-                  <a:srgbClr val="1A1C1F"/>
-                </a:solidFill>
-                <a:effectLst/>
-                <a:latin typeface="-apple-system"/>
-              </a:rPr>
-              <a:t>-next, </a:t>
-            </a:r>
-            <a:r>
-              <a:rPr lang="en-US" sz="2400" b="0" i="0" dirty="0" err="1">
-                <a:solidFill>
-                  <a:srgbClr val="1A1C1F"/>
-                </a:solidFill>
-                <a:effectLst/>
-                <a:latin typeface="-apple-system"/>
-              </a:rPr>
-              <a:t>vue-sonner</a:t>
-            </a:r>
-            <a:r>
-              <a:rPr lang="en-US" sz="2400" b="0" i="0" dirty="0">
-                <a:solidFill>
-                  <a:srgbClr val="1A1C1F"/>
-                </a:solidFill>
-                <a:effectLst/>
-                <a:latin typeface="-apple-system"/>
-              </a:rPr>
-              <a:t> </a:t>
-            </a:r>
-            <a:r>
-              <a:rPr lang="ru-RU" sz="2400" b="0" i="0" dirty="0">
-                <a:solidFill>
-                  <a:srgbClr val="1A1C1F"/>
-                </a:solidFill>
-                <a:effectLst/>
-                <a:latin typeface="-apple-system"/>
-              </a:rPr>
-              <a:t>для </a:t>
-            </a:r>
-            <a:r>
-              <a:rPr lang="en-US" sz="2400" b="0" i="0" dirty="0">
-                <a:solidFill>
-                  <a:srgbClr val="1A1C1F"/>
-                </a:solidFill>
-                <a:effectLst/>
-                <a:latin typeface="-apple-system"/>
-              </a:rPr>
-              <a:t>UI </a:t>
-            </a:r>
-            <a:r>
-              <a:rPr lang="ru-RU" sz="2400" b="0" i="0" dirty="0">
-                <a:solidFill>
-                  <a:srgbClr val="1A1C1F"/>
-                </a:solidFill>
-                <a:effectLst/>
-                <a:latin typeface="-apple-system"/>
-              </a:rPr>
-              <a:t>и визуализации.</a:t>
+            <a:pPr algn="l"/>
+            <a:r>
+              <a:rPr lang="en-US" sz="2800" b="1" i="0" dirty="0">
+                <a:solidFill>
+                  <a:schemeClr val="bg1"/>
+                </a:solidFill>
+                <a:effectLst/>
+                <a:latin typeface="-apple-system"/>
+              </a:rPr>
+              <a:t>ER-</a:t>
+            </a:r>
+            <a:r>
+              <a:rPr lang="ru-RU" sz="2800" b="1" i="0" dirty="0">
+                <a:solidFill>
+                  <a:schemeClr val="bg1"/>
+                </a:solidFill>
+                <a:effectLst/>
+                <a:latin typeface="-apple-system"/>
+              </a:rPr>
+              <a:t>диаграмма базы данных</a:t>
             </a:r>
           </a:p>
         </p:txBody>
@@ -1067,7 +953,7 @@
                   <a:srgbClr val="6C7A70"/>
                 </a:solidFill>
               </a:rPr>
-              <a:t>8</a:t>
+              <a:t>7</a:t>
             </a:r>
             <a:endParaRPr lang="ru-RU" sz="1200" dirty="0"/>
           </a:p>
@@ -1075,10 +961,10 @@
       </p:sp>
       <p:pic>
         <p:nvPicPr>
-          <p:cNvPr id="8" name="Рисунок 7">
+          <p:cNvPr id="9" name="Рисунок 8">
             <a:extLst>
               <a:ext uri="{FF2B5EF4-FFF2-40B4-BE49-F238E27FC236}">
-                <a16:creationId xmlns:a16="http://schemas.microsoft.com/office/drawing/2014/main" id="{AD87D2FB-E749-4A92-9E5B-639E2A6A2172}"/>
+                <a16:creationId xmlns:a16="http://schemas.microsoft.com/office/drawing/2014/main" id="{E0D0E728-48AE-4146-AC3F-005E48F4734B}"/>
               </a:ext>
             </a:extLst>
           </p:cNvPr>
@@ -1095,8 +981,8 @@
         </p:blipFill>
         <p:spPr>
           <a:xfrm>
-            <a:off x="5538176" y="1676400"/>
-            <a:ext cx="6469777" cy="2700228"/>
+            <a:off x="2209800" y="1066800"/>
+            <a:ext cx="7083823" cy="5678192"/>
           </a:xfrm>
           <a:prstGeom prst="rect">
             <a:avLst/>
@@ -1104,6 +990,11 @@
         </p:spPr>
       </p:pic>
     </p:spTree>
+    <p:extLst>
+      <p:ext uri="{BB962C8B-B14F-4D97-AF65-F5344CB8AC3E}">
+        <p14:creationId xmlns:p14="http://schemas.microsoft.com/office/powerpoint/2010/main" val="2039263378"/>
+      </p:ext>
+    </p:extLst>
   </p:cSld>
   <p:clrMapOvr>
     <a:masterClrMapping/>
@@ -1227,7 +1118,7 @@
                   <a:srgbClr val="FFFFFF"/>
                 </a:solidFill>
               </a:rPr>
-              <a:t>Организация frontend-логики</a:t>
+              <a:t>Технологии frontend</a:t>
             </a:r>
             <a:endParaRPr lang="ru-RU" sz="2600" dirty="0"/>
           </a:p>
@@ -1241,8 +1132,8 @@
         </p:nvSpPr>
         <p:spPr>
           <a:xfrm>
-            <a:off x="600000" y="1180000"/>
-            <a:ext cx="6029400" cy="4800000"/>
+            <a:off x="600001" y="1180000"/>
+            <a:ext cx="5343599" cy="4800000"/>
           </a:xfrm>
           <a:prstGeom prst="rect">
             <a:avLst/>
@@ -1261,6 +1152,16 @@
               <a:buChar char="•"/>
             </a:pPr>
             <a:r>
+              <a:rPr lang="en-US" sz="2400" b="0" i="0" dirty="0">
+                <a:solidFill>
+                  <a:srgbClr val="1A1C1F"/>
+                </a:solidFill>
+                <a:effectLst/>
+                <a:latin typeface="-apple-system"/>
+              </a:rPr>
+              <a:t>Vue.js 3 </a:t>
+            </a:r>
+            <a:r>
               <a:rPr lang="ru-RU" sz="2400" b="0" i="0" dirty="0">
                 <a:solidFill>
                   <a:srgbClr val="1A1C1F"/>
@@ -1268,7 +1169,7 @@
                 <a:effectLst/>
                 <a:latin typeface="-apple-system"/>
               </a:rPr>
-              <a:t>единый </a:t>
+              <a:t>как основа </a:t>
             </a:r>
             <a:r>
               <a:rPr lang="en-US" sz="2400" b="0" i="0" dirty="0">
@@ -1278,7 +1179,7 @@
                 <a:effectLst/>
                 <a:latin typeface="-apple-system"/>
               </a:rPr>
-              <a:t>API-</a:t>
+              <a:t>SPA-</a:t>
             </a:r>
             <a:r>
               <a:rPr lang="ru-RU" sz="2400" b="0" i="0" dirty="0">
@@ -1288,17 +1189,7 @@
                 <a:effectLst/>
                 <a:latin typeface="-apple-system"/>
               </a:rPr>
-              <a:t>клиент для запросов к </a:t>
-            </a:r>
-            <a:r>
-              <a:rPr lang="en-US" sz="2400" b="0" i="0" dirty="0">
-                <a:solidFill>
-                  <a:srgbClr val="1A1C1F"/>
-                </a:solidFill>
-                <a:effectLst/>
-                <a:latin typeface="-apple-system"/>
-              </a:rPr>
-              <a:t>backend;</a:t>
+              <a:t>интерфейса;</a:t>
             </a:r>
           </a:p>
           <a:p>
@@ -1307,6 +1198,26 @@
               <a:buChar char="•"/>
             </a:pPr>
             <a:r>
+              <a:rPr lang="en-US" sz="2400" b="0" i="0" dirty="0" err="1">
+                <a:solidFill>
+                  <a:srgbClr val="1A1C1F"/>
+                </a:solidFill>
+                <a:effectLst/>
+                <a:latin typeface="-apple-system"/>
+              </a:rPr>
+              <a:t>Vite</a:t>
+            </a:r>
+            <a:r>
+              <a:rPr lang="en-US" sz="2400" b="0" i="0" dirty="0">
+                <a:solidFill>
+                  <a:srgbClr val="1A1C1F"/>
+                </a:solidFill>
+                <a:effectLst/>
+                <a:latin typeface="-apple-system"/>
+              </a:rPr>
+              <a:t> </a:t>
+            </a:r>
+            <a:r>
               <a:rPr lang="ru-RU" sz="2400" b="0" i="0" dirty="0">
                 <a:solidFill>
                   <a:srgbClr val="1A1C1F"/>
@@ -1314,7 +1225,7 @@
                 <a:effectLst/>
                 <a:latin typeface="-apple-system"/>
               </a:rPr>
-              <a:t>отдельные </a:t>
+              <a:t>для разработки и </a:t>
             </a:r>
             <a:r>
               <a:rPr lang="en-US" sz="2400" b="0" i="0" dirty="0">
@@ -1324,7 +1235,7 @@
                 <a:effectLst/>
                 <a:latin typeface="-apple-system"/>
               </a:rPr>
-              <a:t>store </a:t>
+              <a:t>production-</a:t>
             </a:r>
             <a:r>
               <a:rPr lang="ru-RU" sz="2400" b="0" i="0" dirty="0">
@@ -1334,107 +1245,7 @@
                 <a:effectLst/>
                 <a:latin typeface="-apple-system"/>
               </a:rPr>
-              <a:t>для </a:t>
-            </a:r>
-            <a:r>
-              <a:rPr lang="en-US" sz="2400" b="0" i="0" dirty="0">
-                <a:solidFill>
-                  <a:srgbClr val="1A1C1F"/>
-                </a:solidFill>
-                <a:effectLst/>
-                <a:latin typeface="ui-monospace"/>
-              </a:rPr>
-              <a:t>auth</a:t>
-            </a:r>
-            <a:r>
-              <a:rPr lang="en-US" sz="2400" b="0" i="0" dirty="0">
-                <a:solidFill>
-                  <a:srgbClr val="1A1C1F"/>
-                </a:solidFill>
-                <a:effectLst/>
-                <a:latin typeface="-apple-system"/>
-              </a:rPr>
-              <a:t>, </a:t>
-            </a:r>
-            <a:r>
-              <a:rPr lang="en-US" sz="2400" b="0" i="0" dirty="0">
-                <a:solidFill>
-                  <a:srgbClr val="1A1C1F"/>
-                </a:solidFill>
-                <a:effectLst/>
-                <a:latin typeface="ui-monospace"/>
-              </a:rPr>
-              <a:t>plants</a:t>
-            </a:r>
-            <a:r>
-              <a:rPr lang="en-US" sz="2400" b="0" i="0" dirty="0">
-                <a:solidFill>
-                  <a:srgbClr val="1A1C1F"/>
-                </a:solidFill>
-                <a:effectLst/>
-                <a:latin typeface="-apple-system"/>
-              </a:rPr>
-              <a:t>, </a:t>
-            </a:r>
-            <a:r>
-              <a:rPr lang="en-US" sz="2400" b="0" i="0" dirty="0">
-                <a:solidFill>
-                  <a:srgbClr val="1A1C1F"/>
-                </a:solidFill>
-                <a:effectLst/>
-                <a:latin typeface="ui-monospace"/>
-              </a:rPr>
-              <a:t>tasks</a:t>
-            </a:r>
-            <a:r>
-              <a:rPr lang="en-US" sz="2400" b="0" i="0" dirty="0">
-                <a:solidFill>
-                  <a:srgbClr val="1A1C1F"/>
-                </a:solidFill>
-                <a:effectLst/>
-                <a:latin typeface="-apple-system"/>
-              </a:rPr>
-              <a:t>, </a:t>
-            </a:r>
-            <a:r>
-              <a:rPr lang="en-US" sz="2400" b="0" i="0" dirty="0">
-                <a:solidFill>
-                  <a:srgbClr val="1A1C1F"/>
-                </a:solidFill>
-                <a:effectLst/>
-                <a:latin typeface="ui-monospace"/>
-              </a:rPr>
-              <a:t>social</a:t>
-            </a:r>
-            <a:r>
-              <a:rPr lang="en-US" sz="2400" b="0" i="0" dirty="0">
-                <a:solidFill>
-                  <a:srgbClr val="1A1C1F"/>
-                </a:solidFill>
-                <a:effectLst/>
-                <a:latin typeface="-apple-system"/>
-              </a:rPr>
-              <a:t>, </a:t>
-            </a:r>
-            <a:r>
-              <a:rPr lang="en-US" sz="2400" b="0" i="0" dirty="0">
-                <a:solidFill>
-                  <a:srgbClr val="1A1C1F"/>
-                </a:solidFill>
-                <a:effectLst/>
-                <a:latin typeface="ui-monospace"/>
-              </a:rPr>
-              <a:t>admin</a:t>
-            </a:r>
-            <a:r>
-              <a:rPr lang="en-US" sz="2400" b="0" i="0" dirty="0">
-                <a:solidFill>
-                  <a:srgbClr val="1A1C1F"/>
-                </a:solidFill>
-                <a:effectLst/>
-                <a:latin typeface="-apple-system"/>
-              </a:rPr>
-              <a:t>;</a:t>
+              <a:t>сборки;</a:t>
             </a:r>
           </a:p>
           <a:p>
@@ -1443,6 +1254,16 @@
               <a:buChar char="•"/>
             </a:pPr>
             <a:r>
+              <a:rPr lang="en-US" sz="2400" b="0" i="0" dirty="0">
+                <a:solidFill>
+                  <a:srgbClr val="1A1C1F"/>
+                </a:solidFill>
+                <a:effectLst/>
+                <a:latin typeface="-apple-system"/>
+              </a:rPr>
+              <a:t>Vue Router </a:t>
+            </a:r>
+            <a:r>
               <a:rPr lang="ru-RU" sz="2400" b="0" i="0" dirty="0">
                 <a:solidFill>
                   <a:srgbClr val="1A1C1F"/>
@@ -1450,27 +1271,7 @@
                 <a:effectLst/>
                 <a:latin typeface="-apple-system"/>
               </a:rPr>
-              <a:t>разделение страниц, виджетов, сущностей и </a:t>
-            </a:r>
-            <a:r>
-              <a:rPr lang="en-US" sz="2400" b="0" i="0" dirty="0">
-                <a:solidFill>
-                  <a:srgbClr val="1A1C1F"/>
-                </a:solidFill>
-                <a:effectLst/>
-                <a:latin typeface="-apple-system"/>
-              </a:rPr>
-              <a:t>shared-</a:t>
-            </a:r>
-            <a:r>
-              <a:rPr lang="ru-RU" sz="2400" b="0" i="0" dirty="0">
-                <a:solidFill>
-                  <a:srgbClr val="1A1C1F"/>
-                </a:solidFill>
-                <a:effectLst/>
-                <a:latin typeface="-apple-system"/>
-              </a:rPr>
-              <a:t>логики;</a:t>
+              <a:t>для маршрутизации;</a:t>
             </a:r>
           </a:p>
           <a:p>
@@ -1479,6 +1280,26 @@
               <a:buChar char="•"/>
             </a:pPr>
             <a:r>
+              <a:rPr lang="en-US" sz="2400" b="0" i="0" dirty="0" err="1">
+                <a:solidFill>
+                  <a:srgbClr val="1A1C1F"/>
+                </a:solidFill>
+                <a:effectLst/>
+                <a:latin typeface="-apple-system"/>
+              </a:rPr>
+              <a:t>Pinia</a:t>
+            </a:r>
+            <a:r>
+              <a:rPr lang="en-US" sz="2400" b="0" i="0" dirty="0">
+                <a:solidFill>
+                  <a:srgbClr val="1A1C1F"/>
+                </a:solidFill>
+                <a:effectLst/>
+                <a:latin typeface="-apple-system"/>
+              </a:rPr>
+              <a:t> </a:t>
+            </a:r>
+            <a:r>
               <a:rPr lang="ru-RU" sz="2400" b="0" i="0" dirty="0">
                 <a:solidFill>
                   <a:srgbClr val="1A1C1F"/>
@@ -1486,27 +1307,7 @@
                 <a:effectLst/>
                 <a:latin typeface="-apple-system"/>
               </a:rPr>
-              <a:t>адаптивный интерфейс для</a:t>
-            </a:r>
-            <a:r>
-              <a:rPr lang="en-US" sz="2400" b="0" i="0" dirty="0">
-                <a:solidFill>
-                  <a:srgbClr val="1A1C1F"/>
-                </a:solidFill>
-                <a:effectLst/>
-                <a:latin typeface="-apple-system"/>
-              </a:rPr>
-              <a:t> </a:t>
-            </a:r>
-            <a:r>
-              <a:rPr lang="ru-RU" sz="2400" b="0" i="0" dirty="0">
-                <a:solidFill>
-                  <a:srgbClr val="1A1C1F"/>
-                </a:solidFill>
-                <a:effectLst/>
-                <a:latin typeface="-apple-system"/>
-              </a:rPr>
-              <a:t>компьютеров и мобильных устройств</a:t>
+              <a:t>для централизованного состояния;</a:t>
             </a:r>
           </a:p>
           <a:p>
@@ -1515,6 +1316,26 @@
               <a:buChar char="•"/>
             </a:pPr>
             <a:r>
+              <a:rPr lang="en-US" sz="2400" b="0" i="0" dirty="0" err="1">
+                <a:solidFill>
+                  <a:srgbClr val="1A1C1F"/>
+                </a:solidFill>
+                <a:effectLst/>
+                <a:latin typeface="-apple-system"/>
+              </a:rPr>
+              <a:t>VeeValidate</a:t>
+            </a:r>
+            <a:r>
+              <a:rPr lang="en-US" sz="2400" b="0" i="0" dirty="0">
+                <a:solidFill>
+                  <a:srgbClr val="1A1C1F"/>
+                </a:solidFill>
+                <a:effectLst/>
+                <a:latin typeface="-apple-system"/>
+              </a:rPr>
+              <a:t> </a:t>
+            </a:r>
+            <a:r>
               <a:rPr lang="ru-RU" sz="2400" b="0" i="0" dirty="0">
                 <a:solidFill>
                   <a:srgbClr val="1A1C1F"/>
@@ -1522,7 +1343,153 @@
                 <a:effectLst/>
                 <a:latin typeface="-apple-system"/>
               </a:rPr>
-              <a:t>централизованная обработка ошибок и токенов.</a:t>
+              <a:t>и </a:t>
+            </a:r>
+            <a:r>
+              <a:rPr lang="en-US" sz="2400" b="0" i="0" dirty="0">
+                <a:solidFill>
+                  <a:srgbClr val="1A1C1F"/>
+                </a:solidFill>
+                <a:effectLst/>
+                <a:latin typeface="-apple-system"/>
+              </a:rPr>
+              <a:t>Zod </a:t>
+            </a:r>
+            <a:r>
+              <a:rPr lang="ru-RU" sz="2400" b="0" i="0" dirty="0">
+                <a:solidFill>
+                  <a:srgbClr val="1A1C1F"/>
+                </a:solidFill>
+                <a:effectLst/>
+                <a:latin typeface="-apple-system"/>
+              </a:rPr>
+              <a:t>для форм и валидации;</a:t>
+            </a:r>
+          </a:p>
+          <a:p>
+            <a:pPr algn="l">
+              <a:buFont typeface="Arial" panose="020B0604020202020204" pitchFamily="34" charset="0"/>
+              <a:buChar char="•"/>
+            </a:pPr>
+            <a:r>
+              <a:rPr lang="en-US" sz="2400" b="0" i="0" dirty="0">
+                <a:solidFill>
+                  <a:srgbClr val="1A1C1F"/>
+                </a:solidFill>
+                <a:effectLst/>
+                <a:latin typeface="-apple-system"/>
+              </a:rPr>
+              <a:t>Chart.js, </a:t>
+            </a:r>
+            <a:r>
+              <a:rPr lang="en-US" sz="2400" b="0" i="0" dirty="0" err="1">
+                <a:solidFill>
+                  <a:srgbClr val="1A1C1F"/>
+                </a:solidFill>
+                <a:effectLst/>
+                <a:latin typeface="-apple-system"/>
+              </a:rPr>
+              <a:t>vue-chartjs</a:t>
+            </a:r>
+            <a:r>
+              <a:rPr lang="en-US" sz="2400" b="0" i="0" dirty="0">
+                <a:solidFill>
+                  <a:srgbClr val="1A1C1F"/>
+                </a:solidFill>
+                <a:effectLst/>
+                <a:latin typeface="-apple-system"/>
+              </a:rPr>
+              <a:t>, </a:t>
+            </a:r>
+            <a:r>
+              <a:rPr lang="en-US" sz="2400" b="0" i="0" dirty="0" err="1">
+                <a:solidFill>
+                  <a:srgbClr val="1A1C1F"/>
+                </a:solidFill>
+                <a:effectLst/>
+                <a:latin typeface="-apple-system"/>
+              </a:rPr>
+              <a:t>lucide</a:t>
+            </a:r>
+            <a:r>
+              <a:rPr lang="en-US" sz="2400" b="0" i="0" dirty="0">
+                <a:solidFill>
+                  <a:srgbClr val="1A1C1F"/>
+                </a:solidFill>
+                <a:effectLst/>
+                <a:latin typeface="-apple-system"/>
+              </a:rPr>
+              <a:t>-</a:t>
+            </a:r>
+            <a:r>
+              <a:rPr lang="en-US" sz="2400" b="0" i="0" dirty="0" err="1">
+                <a:solidFill>
+                  <a:srgbClr val="1A1C1F"/>
+                </a:solidFill>
+                <a:effectLst/>
+                <a:latin typeface="-apple-system"/>
+              </a:rPr>
+              <a:t>vue</a:t>
+            </a:r>
+            <a:r>
+              <a:rPr lang="en-US" sz="2400" b="0" i="0" dirty="0">
+                <a:solidFill>
+                  <a:srgbClr val="1A1C1F"/>
+                </a:solidFill>
+                <a:effectLst/>
+                <a:latin typeface="-apple-system"/>
+              </a:rPr>
+              <a:t>-next, </a:t>
+            </a:r>
+            <a:r>
+              <a:rPr lang="en-US" sz="2400" b="0" i="0" dirty="0" err="1">
+                <a:solidFill>
+                  <a:srgbClr val="1A1C1F"/>
+                </a:solidFill>
+                <a:effectLst/>
+                <a:latin typeface="-apple-system"/>
+              </a:rPr>
+              <a:t>vue-sonner</a:t>
+            </a:r>
+            <a:r>
+              <a:rPr lang="en-US" sz="2400" b="0" i="0" dirty="0">
+                <a:solidFill>
+                  <a:srgbClr val="1A1C1F"/>
+                </a:solidFill>
+                <a:effectLst/>
+                <a:latin typeface="-apple-system"/>
+              </a:rPr>
+              <a:t> </a:t>
+            </a:r>
+            <a:r>
+              <a:rPr lang="ru-RU" sz="2400" b="0" i="0" dirty="0">
+                <a:solidFill>
+                  <a:srgbClr val="1A1C1F"/>
+                </a:solidFill>
+                <a:effectLst/>
+                <a:latin typeface="-apple-system"/>
+              </a:rPr>
+              <a:t>для </a:t>
+            </a:r>
+            <a:r>
+              <a:rPr lang="en-US" sz="2400" b="0" i="0" dirty="0">
+                <a:solidFill>
+                  <a:srgbClr val="1A1C1F"/>
+                </a:solidFill>
+                <a:effectLst/>
+                <a:latin typeface="-apple-system"/>
+              </a:rPr>
+              <a:t>UI </a:t>
+            </a:r>
+            <a:r>
+              <a:rPr lang="ru-RU" sz="2400" b="0" i="0" dirty="0">
+                <a:solidFill>
+                  <a:srgbClr val="1A1C1F"/>
+                </a:solidFill>
+                <a:effectLst/>
+                <a:latin typeface="-apple-system"/>
+              </a:rPr>
+              <a:t>и визуализации.</a:t>
             </a:r>
           </a:p>
         </p:txBody>
@@ -1556,12 +1523,42 @@
                   <a:srgbClr val="6C7A70"/>
                 </a:solidFill>
               </a:rPr>
-              <a:t>9</a:t>
+              <a:t>8</a:t>
             </a:r>
             <a:endParaRPr lang="ru-RU" sz="1200" dirty="0"/>
           </a:p>
         </p:txBody>
       </p:sp>
+      <p:pic>
+        <p:nvPicPr>
+          <p:cNvPr id="8" name="Рисунок 7">
+            <a:extLst>
+              <a:ext uri="{FF2B5EF4-FFF2-40B4-BE49-F238E27FC236}">
+                <a16:creationId xmlns:a16="http://schemas.microsoft.com/office/drawing/2014/main" id="{AD87D2FB-E749-4A92-9E5B-639E2A6A2172}"/>
+              </a:ext>
+            </a:extLst>
+          </p:cNvPr>
+          <p:cNvPicPr>
+            <a:picLocks noChangeAspect="1"/>
+          </p:cNvPicPr>
+          <p:nvPr/>
+        </p:nvPicPr>
+        <p:blipFill>
+          <a:blip r:embed="rId2"/>
+          <a:stretch>
+            <a:fillRect/>
+          </a:stretch>
+        </p:blipFill>
+        <p:spPr>
+          <a:xfrm>
+            <a:off x="5538176" y="1676400"/>
+            <a:ext cx="6469777" cy="2700228"/>
+          </a:xfrm>
+          <a:prstGeom prst="rect">
+            <a:avLst/>
+          </a:prstGeom>
+        </p:spPr>
+      </p:pic>
     </p:spTree>
   </p:cSld>
   <p:clrMapOvr>
@@ -1686,7 +1683,7 @@
                   <a:srgbClr val="FFFFFF"/>
                 </a:solidFill>
               </a:rPr>
-              <a:t>Безопасность и контроль качества</a:t>
+              <a:t>Организация frontend-логики</a:t>
             </a:r>
             <a:endParaRPr lang="ru-RU" sz="2600" dirty="0"/>
           </a:p>
@@ -1701,7 +1698,7 @@
         <p:spPr>
           <a:xfrm>
             <a:off x="600000" y="1180000"/>
-            <a:ext cx="10800000" cy="4800000"/>
+            <a:ext cx="6029400" cy="4800000"/>
           </a:xfrm>
           <a:prstGeom prst="rect">
             <a:avLst/>
@@ -1715,48 +1712,274 @@
           <a:bodyPr wrap="square" rtlCol="0" anchor="t"/>
           <a:lstStyle/>
           <a:p>
-            <a:r>
-              <a:rPr lang="ru-RU" sz="1800" dirty="0">
-                <a:solidFill>
-                  <a:srgbClr val="23352B"/>
-                </a:solidFill>
-              </a:rPr>
-              <a:t>Авторизация реализована через Laravel Sanctum и Bearer token.</a:t>
-            </a:r>
-            <a:endParaRPr lang="ru-RU" sz="1800" dirty="0"/>
-          </a:p>
-          <a:p>
-            <a:r>
-              <a:rPr lang="ru-RU" sz="1800" dirty="0">
-                <a:solidFill>
-                  <a:srgbClr val="23352B"/>
-                </a:solidFill>
-              </a:rPr>
-              <a:t>Разграничение доступа выполняется по ролям, middleware и policies.</a:t>
-            </a:r>
-            <a:endParaRPr lang="ru-RU" sz="1800" dirty="0"/>
-          </a:p>
-          <a:p>
-            <a:r>
-              <a:rPr lang="ru-RU" sz="1800" dirty="0">
-                <a:solidFill>
-                  <a:srgbClr val="23352B"/>
-                </a:solidFill>
-              </a:rPr>
-              <a:t>Валидация данных присутствует на backend и frontend, что уменьшает риск сохранения некорректной информации.</a:t>
-            </a:r>
-            <a:endParaRPr lang="ru-RU" sz="1800" dirty="0"/>
-          </a:p>
-          <a:p>
-            <a:r>
-              <a:rPr lang="ru-RU" sz="1800" dirty="0">
-                <a:solidFill>
-                  <a:srgbClr val="23352B"/>
-                </a:solidFill>
-              </a:rPr>
-              <a:t>Качество API контролируется через OpenAPI-контракт и PHPUnit, а стиль кода - через Laravel Pint, ESLint и Prettier.</a:t>
-            </a:r>
-            <a:endParaRPr lang="ru-RU" sz="1800" dirty="0"/>
+            <a:pPr algn="l">
+              <a:buFont typeface="Arial" panose="020B0604020202020204" pitchFamily="34" charset="0"/>
+              <a:buChar char="•"/>
+            </a:pPr>
+            <a:r>
+              <a:rPr lang="ru-RU" sz="2400" b="0" i="0" dirty="0">
+                <a:solidFill>
+                  <a:srgbClr val="1A1C1F"/>
+                </a:solidFill>
+                <a:effectLst/>
+                <a:latin typeface="-apple-system"/>
+              </a:rPr>
+              <a:t>единый </a:t>
+            </a:r>
+            <a:r>
+              <a:rPr lang="en-US" sz="2400" b="0" i="0" dirty="0">
+                <a:solidFill>
+                  <a:srgbClr val="1A1C1F"/>
+                </a:solidFill>
+                <a:effectLst/>
+                <a:latin typeface="-apple-system"/>
+              </a:rPr>
+              <a:t>API-</a:t>
+            </a:r>
+            <a:r>
+              <a:rPr lang="ru-RU" sz="2400" b="0" i="0" dirty="0">
+                <a:solidFill>
+                  <a:srgbClr val="1A1C1F"/>
+                </a:solidFill>
+                <a:effectLst/>
+                <a:latin typeface="-apple-system"/>
+              </a:rPr>
+              <a:t>клиент для запросов к </a:t>
+            </a:r>
+            <a:r>
+              <a:rPr lang="en-US" sz="2400" b="0" i="0" dirty="0">
+                <a:solidFill>
+                  <a:srgbClr val="1A1C1F"/>
+                </a:solidFill>
+                <a:effectLst/>
+                <a:latin typeface="-apple-system"/>
+              </a:rPr>
+              <a:t>backend;</a:t>
+            </a:r>
+          </a:p>
+          <a:p>
+            <a:pPr algn="l">
+              <a:buFont typeface="Arial" panose="020B0604020202020204" pitchFamily="34" charset="0"/>
+              <a:buChar char="•"/>
+            </a:pPr>
+            <a:r>
+              <a:rPr lang="ru-RU" sz="2400" b="0" i="0" dirty="0">
+                <a:solidFill>
+                  <a:srgbClr val="1A1C1F"/>
+                </a:solidFill>
+                <a:effectLst/>
+                <a:latin typeface="-apple-system"/>
+              </a:rPr>
+              <a:t>отдельные </a:t>
+            </a:r>
+            <a:r>
+              <a:rPr lang="en-US" sz="2400" b="0" i="0" dirty="0">
+                <a:solidFill>
+                  <a:srgbClr val="1A1C1F"/>
+                </a:solidFill>
+                <a:effectLst/>
+                <a:latin typeface="-apple-system"/>
+              </a:rPr>
+              <a:t>store </a:t>
+            </a:r>
+            <a:r>
+              <a:rPr lang="ru-RU" sz="2400" b="0" i="0" dirty="0">
+                <a:solidFill>
+                  <a:srgbClr val="1A1C1F"/>
+                </a:solidFill>
+                <a:effectLst/>
+                <a:latin typeface="-apple-system"/>
+              </a:rPr>
+              <a:t>для </a:t>
+            </a:r>
+            <a:r>
+              <a:rPr lang="en-US" sz="2400" b="0" i="0" dirty="0">
+                <a:solidFill>
+                  <a:srgbClr val="1A1C1F"/>
+                </a:solidFill>
+                <a:effectLst/>
+                <a:latin typeface="ui-monospace"/>
+              </a:rPr>
+              <a:t>auth</a:t>
+            </a:r>
+            <a:r>
+              <a:rPr lang="en-US" sz="2400" b="0" i="0" dirty="0">
+                <a:solidFill>
+                  <a:srgbClr val="1A1C1F"/>
+                </a:solidFill>
+                <a:effectLst/>
+                <a:latin typeface="-apple-system"/>
+              </a:rPr>
+              <a:t>, </a:t>
+            </a:r>
+            <a:r>
+              <a:rPr lang="en-US" sz="2400" b="0" i="0" dirty="0">
+                <a:solidFill>
+                  <a:srgbClr val="1A1C1F"/>
+                </a:solidFill>
+                <a:effectLst/>
+                <a:latin typeface="ui-monospace"/>
+              </a:rPr>
+              <a:t>plants</a:t>
+            </a:r>
+            <a:r>
+              <a:rPr lang="en-US" sz="2400" b="0" i="0" dirty="0">
+                <a:solidFill>
+                  <a:srgbClr val="1A1C1F"/>
+                </a:solidFill>
+                <a:effectLst/>
+                <a:latin typeface="-apple-system"/>
+              </a:rPr>
+              <a:t>, </a:t>
+            </a:r>
+            <a:r>
+              <a:rPr lang="en-US" sz="2400" b="0" i="0" dirty="0">
+                <a:solidFill>
+                  <a:srgbClr val="1A1C1F"/>
+                </a:solidFill>
+                <a:effectLst/>
+                <a:latin typeface="ui-monospace"/>
+              </a:rPr>
+              <a:t>tasks</a:t>
+            </a:r>
+            <a:r>
+              <a:rPr lang="en-US" sz="2400" b="0" i="0" dirty="0">
+                <a:solidFill>
+                  <a:srgbClr val="1A1C1F"/>
+                </a:solidFill>
+                <a:effectLst/>
+                <a:latin typeface="-apple-system"/>
+              </a:rPr>
+              <a:t>, </a:t>
+            </a:r>
+            <a:r>
+              <a:rPr lang="en-US" sz="2400" b="0" i="0" dirty="0">
+                <a:solidFill>
+                  <a:srgbClr val="1A1C1F"/>
+                </a:solidFill>
+                <a:effectLst/>
+                <a:latin typeface="ui-monospace"/>
+              </a:rPr>
+              <a:t>social</a:t>
+            </a:r>
+            <a:r>
+              <a:rPr lang="en-US" sz="2400" b="0" i="0" dirty="0">
+                <a:solidFill>
+                  <a:srgbClr val="1A1C1F"/>
+                </a:solidFill>
+                <a:effectLst/>
+                <a:latin typeface="-apple-system"/>
+              </a:rPr>
+              <a:t>, </a:t>
+            </a:r>
+            <a:r>
+              <a:rPr lang="en-US" sz="2400" b="0" i="0" dirty="0">
+                <a:solidFill>
+                  <a:srgbClr val="1A1C1F"/>
+                </a:solidFill>
+                <a:effectLst/>
+                <a:latin typeface="ui-monospace"/>
+              </a:rPr>
+              <a:t>admin</a:t>
+            </a:r>
+            <a:r>
+              <a:rPr lang="en-US" sz="2400" b="0" i="0" dirty="0">
+                <a:solidFill>
+                  <a:srgbClr val="1A1C1F"/>
+                </a:solidFill>
+                <a:effectLst/>
+                <a:latin typeface="-apple-system"/>
+              </a:rPr>
+              <a:t>;</a:t>
+            </a:r>
+          </a:p>
+          <a:p>
+            <a:pPr algn="l">
+              <a:buFont typeface="Arial" panose="020B0604020202020204" pitchFamily="34" charset="0"/>
+              <a:buChar char="•"/>
+            </a:pPr>
+            <a:r>
+              <a:rPr lang="ru-RU" sz="2400" b="0" i="0" dirty="0">
+                <a:solidFill>
+                  <a:srgbClr val="1A1C1F"/>
+                </a:solidFill>
+                <a:effectLst/>
+                <a:latin typeface="-apple-system"/>
+              </a:rPr>
+              <a:t>разделение страниц, виджетов, сущностей и </a:t>
+            </a:r>
+            <a:r>
+              <a:rPr lang="en-US" sz="2400" b="0" i="0" dirty="0">
+                <a:solidFill>
+                  <a:srgbClr val="1A1C1F"/>
+                </a:solidFill>
+                <a:effectLst/>
+                <a:latin typeface="-apple-system"/>
+              </a:rPr>
+              <a:t>shared-</a:t>
+            </a:r>
+            <a:r>
+              <a:rPr lang="ru-RU" sz="2400" b="0" i="0" dirty="0">
+                <a:solidFill>
+                  <a:srgbClr val="1A1C1F"/>
+                </a:solidFill>
+                <a:effectLst/>
+                <a:latin typeface="-apple-system"/>
+              </a:rPr>
+              <a:t>логики;</a:t>
+            </a:r>
+          </a:p>
+          <a:p>
+            <a:pPr algn="l">
+              <a:buFont typeface="Arial" panose="020B0604020202020204" pitchFamily="34" charset="0"/>
+              <a:buChar char="•"/>
+            </a:pPr>
+            <a:r>
+              <a:rPr lang="ru-RU" sz="2400" b="0" i="0" dirty="0">
+                <a:solidFill>
+                  <a:srgbClr val="1A1C1F"/>
+                </a:solidFill>
+                <a:effectLst/>
+                <a:latin typeface="-apple-system"/>
+              </a:rPr>
+              <a:t>адаптивный интерфейс для</a:t>
+            </a:r>
+            <a:r>
+              <a:rPr lang="en-US" sz="2400" b="0" i="0" dirty="0">
+                <a:solidFill>
+                  <a:srgbClr val="1A1C1F"/>
+                </a:solidFill>
+                <a:effectLst/>
+                <a:latin typeface="-apple-system"/>
+              </a:rPr>
+              <a:t> </a:t>
+            </a:r>
+            <a:r>
+              <a:rPr lang="ru-RU" sz="2400" b="0" i="0" dirty="0">
+                <a:solidFill>
+                  <a:srgbClr val="1A1C1F"/>
+                </a:solidFill>
+                <a:effectLst/>
+                <a:latin typeface="-apple-system"/>
+              </a:rPr>
+              <a:t>компьютеров и мобильных устройств</a:t>
+            </a:r>
+          </a:p>
+          <a:p>
+            <a:pPr algn="l">
+              <a:buFont typeface="Arial" panose="020B0604020202020204" pitchFamily="34" charset="0"/>
+              <a:buChar char="•"/>
+            </a:pPr>
+            <a:r>
+              <a:rPr lang="ru-RU" sz="2400" b="0" i="0" dirty="0">
+                <a:solidFill>
+                  <a:srgbClr val="1A1C1F"/>
+                </a:solidFill>
+                <a:effectLst/>
+                <a:latin typeface="-apple-system"/>
+              </a:rPr>
+              <a:t>централизованная обработка ошибок и токенов.</a:t>
+            </a:r>
           </a:p>
         </p:txBody>
       </p:sp>
@@ -1789,7 +2012,7 @@
                   <a:srgbClr val="6C7A70"/>
                 </a:solidFill>
               </a:rPr>
-              <a:t>12</a:t>
+              <a:t>9</a:t>
             </a:r>
             <a:endParaRPr lang="ru-RU" sz="1200" dirty="0"/>
           </a:p>
@@ -2221,7 +2444,7 @@
         <p:spPr>
           <a:xfrm>
             <a:off x="600000" y="1180000"/>
-            <a:ext cx="10800000" cy="4800000"/>
+            <a:ext cx="5648400" cy="4800000"/>
           </a:xfrm>
           <a:prstGeom prst="rect">
             <a:avLst/>
@@ -2324,7 +2547,7 @@
               <a:t>production</a:t>
             </a:r>
             <a:r>
-              <a:rPr lang="ru-RU" b="0" i="0">
+              <a:rPr lang="ru-RU" b="0" i="0" dirty="0">
                 <a:solidFill>
                   <a:srgbClr val="1A1C1F"/>
                 </a:solidFill>
@@ -3055,6 +3278,36 @@
           </a:p>
         </p:txBody>
       </p:sp>
+      <p:pic>
+        <p:nvPicPr>
+          <p:cNvPr id="10" name="Рисунок 9">
+            <a:extLst>
+              <a:ext uri="{FF2B5EF4-FFF2-40B4-BE49-F238E27FC236}">
+                <a16:creationId xmlns:a16="http://schemas.microsoft.com/office/drawing/2014/main" id="{D6F7B031-3BC1-442C-AFAF-3AB3443DBDC0}"/>
+              </a:ext>
+            </a:extLst>
+          </p:cNvPr>
+          <p:cNvPicPr>
+            <a:picLocks noChangeAspect="1"/>
+          </p:cNvPicPr>
+          <p:nvPr/>
+        </p:nvPicPr>
+        <p:blipFill>
+          <a:blip r:embed="rId2"/>
+          <a:stretch>
+            <a:fillRect/>
+          </a:stretch>
+        </p:blipFill>
+        <p:spPr>
+          <a:xfrm>
+            <a:off x="6553200" y="1192700"/>
+            <a:ext cx="4230800" cy="4230800"/>
+          </a:xfrm>
+          <a:prstGeom prst="rect">
+            <a:avLst/>
+          </a:prstGeom>
+        </p:spPr>
+      </p:pic>
     </p:spTree>
   </p:cSld>
   <p:clrMapOvr>
@@ -3194,7 +3447,7 @@
         <p:spPr>
           <a:xfrm>
             <a:off x="600000" y="1180000"/>
-            <a:ext cx="5496000" cy="4800000"/>
+            <a:ext cx="6258000" cy="4800000"/>
           </a:xfrm>
           <a:prstGeom prst="rect">
             <a:avLst/>
@@ -3213,7 +3466,7 @@
               <a:buChar char="•"/>
             </a:pPr>
             <a:r>
-              <a:rPr lang="ru-RU" b="0" i="0" dirty="0">
+              <a:rPr lang="ru-RU" sz="2400" b="0" i="0" dirty="0">
                 <a:solidFill>
                   <a:srgbClr val="1A1C1F"/>
                 </a:solidFill>
@@ -3229,7 +3482,7 @@
               <a:buChar char="•"/>
             </a:pPr>
             <a:r>
-              <a:rPr lang="ru-RU" b="0" i="0" dirty="0">
+              <a:rPr lang="ru-RU" sz="2400" b="0" i="0" dirty="0">
                 <a:solidFill>
                   <a:srgbClr val="1A1C1F"/>
                 </a:solidFill>
@@ -3245,7 +3498,7 @@
               <a:buChar char="•"/>
             </a:pPr>
             <a:r>
-              <a:rPr lang="ru-RU" b="0" i="0" dirty="0">
+              <a:rPr lang="ru-RU" sz="2400" b="0" i="0" dirty="0">
                 <a:solidFill>
                   <a:srgbClr val="1A1C1F"/>
                 </a:solidFill>
@@ -3261,7 +3514,7 @@
               <a:buChar char="•"/>
             </a:pPr>
             <a:r>
-              <a:rPr lang="ru-RU" b="0" i="0" dirty="0">
+              <a:rPr lang="ru-RU" sz="2400" b="0" i="0" dirty="0">
                 <a:solidFill>
                   <a:srgbClr val="1A1C1F"/>
                 </a:solidFill>
@@ -3277,7 +3530,7 @@
               <a:buChar char="•"/>
             </a:pPr>
             <a:r>
-              <a:rPr lang="ru-RU" b="0" i="0" dirty="0">
+              <a:rPr lang="ru-RU" sz="2400" b="0" i="0" dirty="0">
                 <a:solidFill>
                   <a:srgbClr val="1A1C1F"/>
                 </a:solidFill>
@@ -3293,7 +3546,7 @@
               <a:buChar char="•"/>
             </a:pPr>
             <a:r>
-              <a:rPr lang="ru-RU" b="0" i="0" dirty="0">
+              <a:rPr lang="ru-RU" sz="2400" b="0" i="0" dirty="0">
                 <a:solidFill>
                   <a:srgbClr val="1A1C1F"/>
                 </a:solidFill>
@@ -3309,7 +3562,7 @@
               <a:buChar char="•"/>
             </a:pPr>
             <a:r>
-              <a:rPr lang="ru-RU" b="0" i="0" dirty="0">
+              <a:rPr lang="ru-RU" sz="2400" b="0" i="0" dirty="0">
                 <a:solidFill>
                   <a:srgbClr val="1A1C1F"/>
                 </a:solidFill>
@@ -5408,7 +5661,7 @@
                 <a:effectLst/>
                 <a:latin typeface="-apple-system"/>
               </a:rPr>
-              <a:t>Laravel backend</a:t>
+              <a:t>Laravel</a:t>
             </a:r>
           </a:p>
         </p:txBody>
@@ -5491,6 +5744,14 @@
 <file path=ppt/slides/slide9.xml><?xml version="1.0" encoding="utf-8"?>
 <p:sld xmlns:a="http://schemas.openxmlformats.org/drawingml/2006/main" xmlns:r="http://schemas.openxmlformats.org/officeDocument/2006/relationships" xmlns:p="http://schemas.openxmlformats.org/presentationml/2006/main">
   <p:cSld>
+    <p:bg>
+      <p:bgPr>
+        <a:solidFill>
+          <a:srgbClr val="F4F7F1"/>
+        </a:solidFill>
+        <a:effectLst/>
+      </p:bgPr>
+    </p:bg>
     <p:spTree>
       <p:nvGrpSpPr>
         <p:cNvPr id="1" name=""/>
@@ -5590,44 +5851,15 @@
           <a:bodyPr wrap="square" rtlCol="0" anchor="t"/>
           <a:lstStyle/>
           <a:p>
-            <a:pPr algn="l"/>
-            <a:r>
-              <a:rPr lang="en-US" sz="2800" b="1" i="0" dirty="0">
-                <a:solidFill>
-                  <a:schemeClr val="bg1"/>
-                </a:solidFill>
-                <a:effectLst/>
-                <a:latin typeface="-apple-system"/>
-              </a:rPr>
-              <a:t>Docker </a:t>
-            </a:r>
-            <a:r>
-              <a:rPr lang="ru-RU" sz="2800" b="1" i="0" dirty="0">
-                <a:solidFill>
-                  <a:schemeClr val="bg1"/>
-                </a:solidFill>
-                <a:effectLst/>
-                <a:latin typeface="-apple-system"/>
-              </a:rPr>
-              <a:t>и </a:t>
-            </a:r>
-            <a:r>
-              <a:rPr lang="en-US" sz="2800" b="1" i="0" dirty="0" err="1">
-                <a:solidFill>
-                  <a:schemeClr val="bg1"/>
-                </a:solidFill>
-                <a:effectLst/>
-                <a:latin typeface="-apple-system"/>
-              </a:rPr>
-              <a:t>RoadRunner</a:t>
-            </a:r>
-            <a:endParaRPr lang="en-US" sz="2800" b="1" i="0" dirty="0">
-              <a:solidFill>
-                <a:schemeClr val="bg1"/>
-              </a:solidFill>
-              <a:effectLst/>
-              <a:latin typeface="-apple-system"/>
-            </a:endParaRPr>
+            <a:r>
+              <a:rPr lang="ru-RU" sz="2600" b="1" dirty="0">
+                <a:solidFill>
+                  <a:srgbClr val="FFFFFF"/>
+                </a:solidFill>
+              </a:rPr>
+              <a:t>Безопасность и контроль качества</a:t>
+            </a:r>
+            <a:endParaRPr lang="ru-RU" sz="2600" dirty="0"/>
           </a:p>
         </p:txBody>
       </p:sp>
@@ -5640,7 +5872,7 @@
         <p:spPr>
           <a:xfrm>
             <a:off x="600000" y="1180000"/>
-            <a:ext cx="5572200" cy="4800000"/>
+            <a:ext cx="6410400" cy="4800000"/>
           </a:xfrm>
           <a:prstGeom prst="rect">
             <a:avLst/>
@@ -5654,210 +5886,72 @@
           <a:bodyPr wrap="square" rtlCol="0" anchor="t"/>
           <a:lstStyle/>
           <a:p>
-            <a:pPr algn="l">
-              <a:buFont typeface="Arial" panose="020B0604020202020204" pitchFamily="34" charset="0"/>
-              <a:buChar char="•"/>
-            </a:pPr>
-            <a:r>
-              <a:rPr lang="ru-RU" b="0" i="0" dirty="0" err="1">
-                <a:solidFill>
-                  <a:srgbClr val="1A1C1F"/>
-                </a:solidFill>
-                <a:effectLst/>
-                <a:latin typeface="-apple-system"/>
-              </a:rPr>
-              <a:t>Docker</a:t>
-            </a:r>
-            <a:r>
-              <a:rPr lang="ru-RU" b="0" i="0" dirty="0">
-                <a:solidFill>
-                  <a:srgbClr val="1A1C1F"/>
-                </a:solidFill>
-                <a:effectLst/>
-                <a:latin typeface="-apple-system"/>
-              </a:rPr>
-              <a:t> используется для воспроизводимого развертывания;</a:t>
-            </a:r>
-          </a:p>
-          <a:p>
-            <a:pPr algn="l">
-              <a:buFont typeface="Arial" panose="020B0604020202020204" pitchFamily="34" charset="0"/>
-              <a:buChar char="•"/>
-            </a:pPr>
-            <a:r>
-              <a:rPr lang="ru-RU" b="0" i="0" dirty="0">
-                <a:solidFill>
-                  <a:srgbClr val="1A1C1F"/>
-                </a:solidFill>
-                <a:effectLst/>
-                <a:latin typeface="-apple-system"/>
-              </a:rPr>
-              <a:t>контейнеризация уменьшает зависимость от локального окружения;</a:t>
-            </a:r>
-          </a:p>
-          <a:p>
-            <a:pPr algn="l">
-              <a:buFont typeface="Arial" panose="020B0604020202020204" pitchFamily="34" charset="0"/>
-              <a:buChar char="•"/>
-            </a:pPr>
-            <a:r>
-              <a:rPr lang="ru-RU" b="0" i="0" dirty="0" err="1">
-                <a:solidFill>
-                  <a:srgbClr val="1A1C1F"/>
-                </a:solidFill>
-                <a:effectLst/>
-                <a:latin typeface="-apple-system"/>
-              </a:rPr>
-              <a:t>RoadRunner</a:t>
-            </a:r>
-            <a:r>
-              <a:rPr lang="ru-RU" b="0" i="0" dirty="0">
-                <a:solidFill>
-                  <a:srgbClr val="1A1C1F"/>
-                </a:solidFill>
-                <a:effectLst/>
-                <a:latin typeface="-apple-system"/>
-              </a:rPr>
-              <a:t> - высокопроизводительный </a:t>
-            </a:r>
-            <a:r>
-              <a:rPr lang="ru-RU" b="0" i="0" dirty="0" err="1">
-                <a:solidFill>
-                  <a:srgbClr val="1A1C1F"/>
-                </a:solidFill>
-                <a:effectLst/>
-                <a:latin typeface="-apple-system"/>
-              </a:rPr>
-              <a:t>application</a:t>
-            </a:r>
-            <a:r>
-              <a:rPr lang="ru-RU" b="0" i="0" dirty="0">
-                <a:solidFill>
-                  <a:srgbClr val="1A1C1F"/>
-                </a:solidFill>
-                <a:effectLst/>
-                <a:latin typeface="-apple-system"/>
+            <a:r>
+              <a:rPr lang="ru-RU" sz="1800" dirty="0">
+                <a:solidFill>
+                  <a:srgbClr val="23352B"/>
+                </a:solidFill>
+              </a:rPr>
+              <a:t>Авторизация реализована через Laravel Sanctum и Bearer token.</a:t>
+            </a:r>
+            <a:endParaRPr lang="ru-RU" sz="1800" dirty="0"/>
+          </a:p>
+          <a:p>
+            <a:r>
+              <a:rPr lang="ru-RU" sz="1800" dirty="0">
+                <a:solidFill>
+                  <a:srgbClr val="23352B"/>
+                </a:solidFill>
+              </a:rPr>
+              <a:t>Разграничение доступа выполняется по ролям, middleware и policies.</a:t>
+            </a:r>
+            <a:endParaRPr lang="ru-RU" sz="1800" dirty="0"/>
+          </a:p>
+          <a:p>
+            <a:r>
+              <a:rPr lang="ru-RU" sz="1800" dirty="0">
+                <a:solidFill>
+                  <a:srgbClr val="23352B"/>
+                </a:solidFill>
+              </a:rPr>
+              <a:t>Валидация данных присутствует на backend и frontend, что уменьшает риск сохранения некорректной информации.</a:t>
+            </a:r>
+            <a:endParaRPr lang="ru-RU" sz="1800" dirty="0"/>
+          </a:p>
+          <a:p>
+            <a:r>
+              <a:rPr lang="ru-RU" sz="1800" dirty="0">
+                <a:solidFill>
+                  <a:srgbClr val="23352B"/>
+                </a:solidFill>
+              </a:rPr>
+              <a:t>Качество API контролируется через OpenAPI-контракт и PHPUnit, а стиль кода - через </a:t>
+            </a:r>
+            <a:r>
+              <a:rPr lang="ru-RU" sz="1800" dirty="0" err="1">
+                <a:solidFill>
+                  <a:srgbClr val="23352B"/>
+                </a:solidFill>
+              </a:rPr>
+              <a:t>Laravel</a:t>
+            </a:r>
+            <a:r>
+              <a:rPr lang="ru-RU" sz="1800" dirty="0">
+                <a:solidFill>
+                  <a:srgbClr val="23352B"/>
+                </a:solidFill>
               </a:rPr>
               <a:t> </a:t>
             </a:r>
             <a:r>
-              <a:rPr lang="ru-RU" b="0" i="0" dirty="0" err="1">
-                <a:solidFill>
-                  <a:srgbClr val="1A1C1F"/>
-                </a:solidFill>
-                <a:effectLst/>
-                <a:latin typeface="-apple-system"/>
-              </a:rPr>
-              <a:t>server</a:t>
-            </a:r>
-            <a:r>
-              <a:rPr lang="ru-RU" b="0" i="0" dirty="0">
-                <a:solidFill>
-                  <a:srgbClr val="1A1C1F"/>
-                </a:solidFill>
-                <a:effectLst/>
-                <a:latin typeface="-apple-system"/>
-              </a:rPr>
-              <a:t> для PHP;</a:t>
-            </a:r>
-          </a:p>
-          <a:p>
-            <a:pPr algn="l">
-              <a:buFont typeface="Arial" panose="020B0604020202020204" pitchFamily="34" charset="0"/>
-              <a:buChar char="•"/>
-            </a:pPr>
-            <a:r>
-              <a:rPr lang="ru-RU" b="0" i="0" dirty="0" err="1">
-                <a:solidFill>
-                  <a:srgbClr val="1A1C1F"/>
-                </a:solidFill>
-                <a:effectLst/>
-                <a:latin typeface="-apple-system"/>
-              </a:rPr>
-              <a:t>Laravel</a:t>
-            </a:r>
-            <a:r>
-              <a:rPr lang="ru-RU" b="0" i="0" dirty="0">
-                <a:solidFill>
-                  <a:srgbClr val="1A1C1F"/>
-                </a:solidFill>
-                <a:effectLst/>
-                <a:latin typeface="-apple-system"/>
-              </a:rPr>
-              <a:t> в связке с </a:t>
-            </a:r>
-            <a:r>
-              <a:rPr lang="ru-RU" b="0" i="0" dirty="0" err="1">
-                <a:solidFill>
-                  <a:srgbClr val="1A1C1F"/>
-                </a:solidFill>
-                <a:effectLst/>
-                <a:latin typeface="-apple-system"/>
-              </a:rPr>
-              <a:t>RoadRunner</a:t>
-            </a:r>
-            <a:r>
-              <a:rPr lang="ru-RU" b="0" i="0" dirty="0">
-                <a:solidFill>
-                  <a:srgbClr val="1A1C1F"/>
-                </a:solidFill>
-                <a:effectLst/>
-                <a:latin typeface="-apple-system"/>
-              </a:rPr>
-              <a:t> работает через долгоживущие </a:t>
-            </a:r>
-            <a:r>
-              <a:rPr lang="ru-RU" b="0" i="0" dirty="0" err="1">
-                <a:solidFill>
-                  <a:srgbClr val="1A1C1F"/>
-                </a:solidFill>
-                <a:effectLst/>
-                <a:latin typeface="-apple-system"/>
-              </a:rPr>
-              <a:t>worker</a:t>
-            </a:r>
-            <a:r>
-              <a:rPr lang="ru-RU" b="0" i="0" dirty="0">
-                <a:solidFill>
-                  <a:srgbClr val="1A1C1F"/>
-                </a:solidFill>
-                <a:effectLst/>
-                <a:latin typeface="-apple-system"/>
-              </a:rPr>
-              <a:t>-процессы;</a:t>
-            </a:r>
-          </a:p>
-          <a:p>
-            <a:pPr algn="l">
-              <a:buFont typeface="Arial" panose="020B0604020202020204" pitchFamily="34" charset="0"/>
-              <a:buChar char="•"/>
-            </a:pPr>
-            <a:r>
-              <a:rPr lang="ru-RU" b="0" i="0" dirty="0">
-                <a:solidFill>
-                  <a:srgbClr val="1A1C1F"/>
-                </a:solidFill>
-                <a:effectLst/>
-                <a:latin typeface="-apple-system"/>
-              </a:rPr>
-              <a:t>уменьшаются затраты на повторную инициализацию приложения;</a:t>
-            </a:r>
-          </a:p>
-          <a:p>
-            <a:pPr algn="l">
-              <a:buFont typeface="Arial" panose="020B0604020202020204" pitchFamily="34" charset="0"/>
-              <a:buChar char="•"/>
-            </a:pPr>
-            <a:r>
-              <a:rPr lang="ru-RU" b="0" i="0" dirty="0">
-                <a:solidFill>
-                  <a:srgbClr val="1A1C1F"/>
-                </a:solidFill>
-                <a:effectLst/>
-                <a:latin typeface="-apple-system"/>
-              </a:rPr>
-              <a:t>особенно заметен эффект на часто вызываемых API-маршрутах.</a:t>
-            </a:r>
+              <a:rPr lang="ru-RU" sz="1800" dirty="0" err="1">
+                <a:solidFill>
+                  <a:srgbClr val="23352B"/>
+                </a:solidFill>
+              </a:rPr>
+              <a:t>Pint</a:t>
+            </a:r>
+            <a:endParaRPr lang="ru-RU" sz="1800" dirty="0"/>
           </a:p>
         </p:txBody>
       </p:sp>
@@ -5890,53 +5984,13 @@
                   <a:srgbClr val="6C7A70"/>
                 </a:solidFill>
               </a:rPr>
-              <a:t>7</a:t>
+              <a:t>12</a:t>
             </a:r>
             <a:endParaRPr lang="ru-RU" sz="1200" dirty="0"/>
           </a:p>
         </p:txBody>
       </p:sp>
-      <p:sp>
-        <p:nvSpPr>
-          <p:cNvPr id="7" name="TextBox 6">
-            <a:extLst>
-              <a:ext uri="{FF2B5EF4-FFF2-40B4-BE49-F238E27FC236}">
-                <a16:creationId xmlns:a16="http://schemas.microsoft.com/office/drawing/2014/main" id="{46ADF31C-0025-49D7-8445-DE2B78ED1E68}"/>
-              </a:ext>
-            </a:extLst>
-          </p:cNvPr>
-          <p:cNvSpPr txBox="1"/>
-          <p:nvPr/>
-        </p:nvSpPr>
-        <p:spPr>
-          <a:xfrm>
-            <a:off x="7315200" y="2590800"/>
-            <a:ext cx="3733800" cy="646331"/>
-          </a:xfrm>
-          <a:prstGeom prst="rect">
-            <a:avLst/>
-          </a:prstGeom>
-          <a:noFill/>
-        </p:spPr>
-        <p:txBody>
-          <a:bodyPr wrap="square" rtlCol="0">
-            <a:spAutoFit/>
-          </a:bodyPr>
-          <a:lstStyle/>
-          <a:p>
-            <a:r>
-              <a:rPr lang="ru-RU" dirty="0"/>
-              <a:t>Картинка где наглядно сравнивается скорость работы</a:t>
-            </a:r>
-          </a:p>
-        </p:txBody>
-      </p:sp>
     </p:spTree>
-    <p:extLst>
-      <p:ext uri="{BB962C8B-B14F-4D97-AF65-F5344CB8AC3E}">
-        <p14:creationId xmlns:p14="http://schemas.microsoft.com/office/powerpoint/2010/main" val="4286770091"/>
-      </p:ext>
-    </p:extLst>
   </p:cSld>
   <p:clrMapOvr>
     <a:masterClrMapping/>
